--- a/LLM_and_Enterprise_RAG_Bootcamp/Slides/Week_03_retrieval.pptx
+++ b/LLM_and_Enterprise_RAG_Bootcamp/Slides/Week_03_retrieval.pptx
@@ -3302,7 +3302,7 @@
         </p:nvSpPr>
         <p:spPr>
           <a:xfrm>
-            <a:off x="548640" y="6035040"/>
+            <a:off x="548640" y="5760720"/>
             <a:ext cx="7315200" cy="365760"/>
           </a:xfrm>
           <a:prstGeom prst="rect">
@@ -3324,7 +3324,7 @@
                 </a:solidFill>
                 <a:latin typeface="Calibri"/>
               </a:rPr>
-              <a:t>Saturday, June 20, 2026</a:t>
+              <a:t>Saturday, October 17, 2026</a:t>
             </a:r>
           </a:p>
         </p:txBody>
@@ -3337,7 +3337,7 @@
         </p:nvSpPr>
         <p:spPr>
           <a:xfrm>
-            <a:off x="548640" y="6400800"/>
+            <a:off x="548640" y="6126480"/>
             <a:ext cx="9144000" cy="365760"/>
           </a:xfrm>
           <a:prstGeom prst="rect">
@@ -3360,6 +3360,41 @@
                 <a:latin typeface="Calibri"/>
               </a:rPr>
               <a:t>LLM and Enterprise RAG Bootcamp | Instructor: Pavan R</a:t>
+            </a:r>
+          </a:p>
+        </p:txBody>
+      </p:sp>
+      <p:sp>
+        <p:nvSpPr>
+          <p:cNvPr id="9" name="TextBox 8"/>
+          <p:cNvSpPr txBox="1"/>
+          <p:nvPr/>
+        </p:nvSpPr>
+        <p:spPr>
+          <a:xfrm>
+            <a:off x="457200" y="6620256"/>
+            <a:ext cx="11247120" cy="201168"/>
+          </a:xfrm>
+          <a:prstGeom prst="rect">
+            <a:avLst/>
+          </a:prstGeom>
+          <a:noFill/>
+        </p:spPr>
+        <p:txBody>
+          <a:bodyPr wrap="square">
+            <a:spAutoFit/>
+          </a:bodyPr>
+          <a:lstStyle/>
+          <a:p>
+            <a:pPr algn="ctr"/>
+            <a:r>
+              <a:rPr sz="800" b="0">
+                <a:solidFill>
+                  <a:srgbClr val="FFFFFF"/>
+                </a:solidFill>
+                <a:latin typeface="Calibri"/>
+              </a:rPr>
+              <a:t>© 2026 Proxiant Academy | info@proxiant.com | proxiant.ai/training</a:t>
             </a:r>
           </a:p>
         </p:txBody>
@@ -3577,6 +3612,41 @@
           </a:p>
         </p:txBody>
       </p:sp>
+      <p:sp>
+        <p:nvSpPr>
+          <p:cNvPr id="7" name="TextBox 6"/>
+          <p:cNvSpPr txBox="1"/>
+          <p:nvPr/>
+        </p:nvSpPr>
+        <p:spPr>
+          <a:xfrm>
+            <a:off x="457200" y="6620256"/>
+            <a:ext cx="11247120" cy="201168"/>
+          </a:xfrm>
+          <a:prstGeom prst="rect">
+            <a:avLst/>
+          </a:prstGeom>
+          <a:noFill/>
+        </p:spPr>
+        <p:txBody>
+          <a:bodyPr wrap="square">
+            <a:spAutoFit/>
+          </a:bodyPr>
+          <a:lstStyle/>
+          <a:p>
+            <a:pPr algn="ctr"/>
+            <a:r>
+              <a:rPr sz="800" b="0">
+                <a:solidFill>
+                  <a:srgbClr val="FFFFFF"/>
+                </a:solidFill>
+                <a:latin typeface="Calibri"/>
+              </a:rPr>
+              <a:t>© 2026 Proxiant Academy | info@proxiant.com | proxiant.ai/training</a:t>
+            </a:r>
+          </a:p>
+        </p:txBody>
+      </p:sp>
     </p:spTree>
   </p:cSld>
   <p:clrMapOvr>
@@ -3790,6 +3860,41 @@
           </a:p>
         </p:txBody>
       </p:sp>
+      <p:sp>
+        <p:nvSpPr>
+          <p:cNvPr id="7" name="TextBox 6"/>
+          <p:cNvSpPr txBox="1"/>
+          <p:nvPr/>
+        </p:nvSpPr>
+        <p:spPr>
+          <a:xfrm>
+            <a:off x="457200" y="6620256"/>
+            <a:ext cx="11247120" cy="201168"/>
+          </a:xfrm>
+          <a:prstGeom prst="rect">
+            <a:avLst/>
+          </a:prstGeom>
+          <a:noFill/>
+        </p:spPr>
+        <p:txBody>
+          <a:bodyPr wrap="square">
+            <a:spAutoFit/>
+          </a:bodyPr>
+          <a:lstStyle/>
+          <a:p>
+            <a:pPr algn="ctr"/>
+            <a:r>
+              <a:rPr sz="800" b="0">
+                <a:solidFill>
+                  <a:srgbClr val="FFFFFF"/>
+                </a:solidFill>
+                <a:latin typeface="Calibri"/>
+              </a:rPr>
+              <a:t>© 2026 Proxiant Academy | info@proxiant.com | proxiant.ai/training</a:t>
+            </a:r>
+          </a:p>
+        </p:txBody>
+      </p:sp>
     </p:spTree>
   </p:cSld>
   <p:clrMapOvr>
@@ -3964,6 +4069,41 @@
           </a:p>
         </p:txBody>
       </p:sp>
+      <p:sp>
+        <p:nvSpPr>
+          <p:cNvPr id="6" name="TextBox 5"/>
+          <p:cNvSpPr txBox="1"/>
+          <p:nvPr/>
+        </p:nvSpPr>
+        <p:spPr>
+          <a:xfrm>
+            <a:off x="457200" y="6620256"/>
+            <a:ext cx="11247120" cy="201168"/>
+          </a:xfrm>
+          <a:prstGeom prst="rect">
+            <a:avLst/>
+          </a:prstGeom>
+          <a:noFill/>
+        </p:spPr>
+        <p:txBody>
+          <a:bodyPr wrap="square">
+            <a:spAutoFit/>
+          </a:bodyPr>
+          <a:lstStyle/>
+          <a:p>
+            <a:pPr algn="ctr"/>
+            <a:r>
+              <a:rPr sz="800" b="0">
+                <a:solidFill>
+                  <a:srgbClr val="1E2761"/>
+                </a:solidFill>
+                <a:latin typeface="Calibri"/>
+              </a:rPr>
+              <a:t>© 2026 Proxiant Academy | info@proxiant.com | proxiant.ai/training</a:t>
+            </a:r>
+          </a:p>
+        </p:txBody>
+      </p:sp>
     </p:spTree>
   </p:cSld>
   <p:clrMapOvr>
@@ -4177,6 +4317,41 @@
           </a:p>
         </p:txBody>
       </p:sp>
+      <p:sp>
+        <p:nvSpPr>
+          <p:cNvPr id="7" name="TextBox 6"/>
+          <p:cNvSpPr txBox="1"/>
+          <p:nvPr/>
+        </p:nvSpPr>
+        <p:spPr>
+          <a:xfrm>
+            <a:off x="457200" y="6620256"/>
+            <a:ext cx="11247120" cy="201168"/>
+          </a:xfrm>
+          <a:prstGeom prst="rect">
+            <a:avLst/>
+          </a:prstGeom>
+          <a:noFill/>
+        </p:spPr>
+        <p:txBody>
+          <a:bodyPr wrap="square">
+            <a:spAutoFit/>
+          </a:bodyPr>
+          <a:lstStyle/>
+          <a:p>
+            <a:pPr algn="ctr"/>
+            <a:r>
+              <a:rPr sz="800" b="0">
+                <a:solidFill>
+                  <a:srgbClr val="FFFFFF"/>
+                </a:solidFill>
+                <a:latin typeface="Calibri"/>
+              </a:rPr>
+              <a:t>© 2026 Proxiant Academy | info@proxiant.com | proxiant.ai/training</a:t>
+            </a:r>
+          </a:p>
+        </p:txBody>
+      </p:sp>
     </p:spTree>
   </p:cSld>
   <p:clrMapOvr>
@@ -4390,6 +4565,41 @@
           </a:p>
         </p:txBody>
       </p:sp>
+      <p:sp>
+        <p:nvSpPr>
+          <p:cNvPr id="7" name="TextBox 6"/>
+          <p:cNvSpPr txBox="1"/>
+          <p:nvPr/>
+        </p:nvSpPr>
+        <p:spPr>
+          <a:xfrm>
+            <a:off x="457200" y="6620256"/>
+            <a:ext cx="11247120" cy="201168"/>
+          </a:xfrm>
+          <a:prstGeom prst="rect">
+            <a:avLst/>
+          </a:prstGeom>
+          <a:noFill/>
+        </p:spPr>
+        <p:txBody>
+          <a:bodyPr wrap="square">
+            <a:spAutoFit/>
+          </a:bodyPr>
+          <a:lstStyle/>
+          <a:p>
+            <a:pPr algn="ctr"/>
+            <a:r>
+              <a:rPr sz="800" b="0">
+                <a:solidFill>
+                  <a:srgbClr val="FFFFFF"/>
+                </a:solidFill>
+                <a:latin typeface="Calibri"/>
+              </a:rPr>
+              <a:t>© 2026 Proxiant Academy | info@proxiant.com | proxiant.ai/training</a:t>
+            </a:r>
+          </a:p>
+        </p:txBody>
+      </p:sp>
     </p:spTree>
   </p:cSld>
   <p:clrMapOvr>
@@ -4603,6 +4813,41 @@
           </a:p>
         </p:txBody>
       </p:sp>
+      <p:sp>
+        <p:nvSpPr>
+          <p:cNvPr id="7" name="TextBox 6"/>
+          <p:cNvSpPr txBox="1"/>
+          <p:nvPr/>
+        </p:nvSpPr>
+        <p:spPr>
+          <a:xfrm>
+            <a:off x="457200" y="6620256"/>
+            <a:ext cx="11247120" cy="201168"/>
+          </a:xfrm>
+          <a:prstGeom prst="rect">
+            <a:avLst/>
+          </a:prstGeom>
+          <a:noFill/>
+        </p:spPr>
+        <p:txBody>
+          <a:bodyPr wrap="square">
+            <a:spAutoFit/>
+          </a:bodyPr>
+          <a:lstStyle/>
+          <a:p>
+            <a:pPr algn="ctr"/>
+            <a:r>
+              <a:rPr sz="800" b="0">
+                <a:solidFill>
+                  <a:srgbClr val="FFFFFF"/>
+                </a:solidFill>
+                <a:latin typeface="Calibri"/>
+              </a:rPr>
+              <a:t>© 2026 Proxiant Academy | info@proxiant.com | proxiant.ai/training</a:t>
+            </a:r>
+          </a:p>
+        </p:txBody>
+      </p:sp>
     </p:spTree>
   </p:cSld>
   <p:clrMapOvr>
@@ -4945,6 +5190,41 @@
           </a:p>
         </p:txBody>
       </p:sp>
+      <p:sp>
+        <p:nvSpPr>
+          <p:cNvPr id="7" name="TextBox 6"/>
+          <p:cNvSpPr txBox="1"/>
+          <p:nvPr/>
+        </p:nvSpPr>
+        <p:spPr>
+          <a:xfrm>
+            <a:off x="457200" y="6620256"/>
+            <a:ext cx="11247120" cy="201168"/>
+          </a:xfrm>
+          <a:prstGeom prst="rect">
+            <a:avLst/>
+          </a:prstGeom>
+          <a:noFill/>
+        </p:spPr>
+        <p:txBody>
+          <a:bodyPr wrap="square">
+            <a:spAutoFit/>
+          </a:bodyPr>
+          <a:lstStyle/>
+          <a:p>
+            <a:pPr algn="ctr"/>
+            <a:r>
+              <a:rPr sz="800" b="0">
+                <a:solidFill>
+                  <a:srgbClr val="FFFFFF"/>
+                </a:solidFill>
+                <a:latin typeface="Calibri"/>
+              </a:rPr>
+              <a:t>© 2026 Proxiant Academy | info@proxiant.com | proxiant.ai/training</a:t>
+            </a:r>
+          </a:p>
+        </p:txBody>
+      </p:sp>
     </p:spTree>
   </p:cSld>
   <p:clrMapOvr>
@@ -5158,6 +5438,41 @@
           </a:p>
         </p:txBody>
       </p:sp>
+      <p:sp>
+        <p:nvSpPr>
+          <p:cNvPr id="7" name="TextBox 6"/>
+          <p:cNvSpPr txBox="1"/>
+          <p:nvPr/>
+        </p:nvSpPr>
+        <p:spPr>
+          <a:xfrm>
+            <a:off x="457200" y="6620256"/>
+            <a:ext cx="11247120" cy="201168"/>
+          </a:xfrm>
+          <a:prstGeom prst="rect">
+            <a:avLst/>
+          </a:prstGeom>
+          <a:noFill/>
+        </p:spPr>
+        <p:txBody>
+          <a:bodyPr wrap="square">
+            <a:spAutoFit/>
+          </a:bodyPr>
+          <a:lstStyle/>
+          <a:p>
+            <a:pPr algn="ctr"/>
+            <a:r>
+              <a:rPr sz="800" b="0">
+                <a:solidFill>
+                  <a:srgbClr val="FFFFFF"/>
+                </a:solidFill>
+                <a:latin typeface="Calibri"/>
+              </a:rPr>
+              <a:t>© 2026 Proxiant Academy | info@proxiant.com | proxiant.ai/training</a:t>
+            </a:r>
+          </a:p>
+        </p:txBody>
+      </p:sp>
     </p:spTree>
   </p:cSld>
   <p:clrMapOvr>
@@ -5371,6 +5686,41 @@
           </a:p>
         </p:txBody>
       </p:sp>
+      <p:sp>
+        <p:nvSpPr>
+          <p:cNvPr id="7" name="TextBox 6"/>
+          <p:cNvSpPr txBox="1"/>
+          <p:nvPr/>
+        </p:nvSpPr>
+        <p:spPr>
+          <a:xfrm>
+            <a:off x="457200" y="6620256"/>
+            <a:ext cx="11247120" cy="201168"/>
+          </a:xfrm>
+          <a:prstGeom prst="rect">
+            <a:avLst/>
+          </a:prstGeom>
+          <a:noFill/>
+        </p:spPr>
+        <p:txBody>
+          <a:bodyPr wrap="square">
+            <a:spAutoFit/>
+          </a:bodyPr>
+          <a:lstStyle/>
+          <a:p>
+            <a:pPr algn="ctr"/>
+            <a:r>
+              <a:rPr sz="800" b="0">
+                <a:solidFill>
+                  <a:srgbClr val="FFFFFF"/>
+                </a:solidFill>
+                <a:latin typeface="Calibri"/>
+              </a:rPr>
+              <a:t>© 2026 Proxiant Academy | info@proxiant.com | proxiant.ai/training</a:t>
+            </a:r>
+          </a:p>
+        </p:txBody>
+      </p:sp>
     </p:spTree>
   </p:cSld>
   <p:clrMapOvr>
@@ -5545,6 +5895,41 @@
           </a:p>
         </p:txBody>
       </p:sp>
+      <p:sp>
+        <p:nvSpPr>
+          <p:cNvPr id="6" name="TextBox 5"/>
+          <p:cNvSpPr txBox="1"/>
+          <p:nvPr/>
+        </p:nvSpPr>
+        <p:spPr>
+          <a:xfrm>
+            <a:off x="457200" y="6620256"/>
+            <a:ext cx="11247120" cy="201168"/>
+          </a:xfrm>
+          <a:prstGeom prst="rect">
+            <a:avLst/>
+          </a:prstGeom>
+          <a:noFill/>
+        </p:spPr>
+        <p:txBody>
+          <a:bodyPr wrap="square">
+            <a:spAutoFit/>
+          </a:bodyPr>
+          <a:lstStyle/>
+          <a:p>
+            <a:pPr algn="ctr"/>
+            <a:r>
+              <a:rPr sz="800" b="0">
+                <a:solidFill>
+                  <a:srgbClr val="1E2761"/>
+                </a:solidFill>
+                <a:latin typeface="Calibri"/>
+              </a:rPr>
+              <a:t>© 2026 Proxiant Academy | info@proxiant.com | proxiant.ai/training</a:t>
+            </a:r>
+          </a:p>
+        </p:txBody>
+      </p:sp>
     </p:spTree>
   </p:cSld>
   <p:clrMapOvr>
@@ -5719,6 +6104,41 @@
           </a:p>
         </p:txBody>
       </p:sp>
+      <p:sp>
+        <p:nvSpPr>
+          <p:cNvPr id="6" name="TextBox 5"/>
+          <p:cNvSpPr txBox="1"/>
+          <p:nvPr/>
+        </p:nvSpPr>
+        <p:spPr>
+          <a:xfrm>
+            <a:off x="457200" y="6620256"/>
+            <a:ext cx="11247120" cy="201168"/>
+          </a:xfrm>
+          <a:prstGeom prst="rect">
+            <a:avLst/>
+          </a:prstGeom>
+          <a:noFill/>
+        </p:spPr>
+        <p:txBody>
+          <a:bodyPr wrap="square">
+            <a:spAutoFit/>
+          </a:bodyPr>
+          <a:lstStyle/>
+          <a:p>
+            <a:pPr algn="ctr"/>
+            <a:r>
+              <a:rPr sz="800" b="0">
+                <a:solidFill>
+                  <a:srgbClr val="1E2761"/>
+                </a:solidFill>
+                <a:latin typeface="Calibri"/>
+              </a:rPr>
+              <a:t>© 2026 Proxiant Academy | info@proxiant.com | proxiant.ai/training</a:t>
+            </a:r>
+          </a:p>
+        </p:txBody>
+      </p:sp>
     </p:spTree>
   </p:cSld>
   <p:clrMapOvr>
@@ -5932,6 +6352,41 @@
           </a:p>
         </p:txBody>
       </p:sp>
+      <p:sp>
+        <p:nvSpPr>
+          <p:cNvPr id="7" name="TextBox 6"/>
+          <p:cNvSpPr txBox="1"/>
+          <p:nvPr/>
+        </p:nvSpPr>
+        <p:spPr>
+          <a:xfrm>
+            <a:off x="457200" y="6620256"/>
+            <a:ext cx="11247120" cy="201168"/>
+          </a:xfrm>
+          <a:prstGeom prst="rect">
+            <a:avLst/>
+          </a:prstGeom>
+          <a:noFill/>
+        </p:spPr>
+        <p:txBody>
+          <a:bodyPr wrap="square">
+            <a:spAutoFit/>
+          </a:bodyPr>
+          <a:lstStyle/>
+          <a:p>
+            <a:pPr algn="ctr"/>
+            <a:r>
+              <a:rPr sz="800" b="0">
+                <a:solidFill>
+                  <a:srgbClr val="FFFFFF"/>
+                </a:solidFill>
+                <a:latin typeface="Calibri"/>
+              </a:rPr>
+              <a:t>© 2026 Proxiant Academy | info@proxiant.com | proxiant.ai/training</a:t>
+            </a:r>
+          </a:p>
+        </p:txBody>
+      </p:sp>
     </p:spTree>
   </p:cSld>
   <p:clrMapOvr>
@@ -6145,6 +6600,41 @@
           </a:p>
         </p:txBody>
       </p:sp>
+      <p:sp>
+        <p:nvSpPr>
+          <p:cNvPr id="7" name="TextBox 6"/>
+          <p:cNvSpPr txBox="1"/>
+          <p:nvPr/>
+        </p:nvSpPr>
+        <p:spPr>
+          <a:xfrm>
+            <a:off x="457200" y="6620256"/>
+            <a:ext cx="11247120" cy="201168"/>
+          </a:xfrm>
+          <a:prstGeom prst="rect">
+            <a:avLst/>
+          </a:prstGeom>
+          <a:noFill/>
+        </p:spPr>
+        <p:txBody>
+          <a:bodyPr wrap="square">
+            <a:spAutoFit/>
+          </a:bodyPr>
+          <a:lstStyle/>
+          <a:p>
+            <a:pPr algn="ctr"/>
+            <a:r>
+              <a:rPr sz="800" b="0">
+                <a:solidFill>
+                  <a:srgbClr val="FFFFFF"/>
+                </a:solidFill>
+                <a:latin typeface="Calibri"/>
+              </a:rPr>
+              <a:t>© 2026 Proxiant Academy | info@proxiant.com | proxiant.ai/training</a:t>
+            </a:r>
+          </a:p>
+        </p:txBody>
+      </p:sp>
     </p:spTree>
   </p:cSld>
   <p:clrMapOvr>
@@ -6319,6 +6809,41 @@
           </a:p>
         </p:txBody>
       </p:sp>
+      <p:sp>
+        <p:nvSpPr>
+          <p:cNvPr id="6" name="TextBox 5"/>
+          <p:cNvSpPr txBox="1"/>
+          <p:nvPr/>
+        </p:nvSpPr>
+        <p:spPr>
+          <a:xfrm>
+            <a:off x="457200" y="6620256"/>
+            <a:ext cx="11247120" cy="201168"/>
+          </a:xfrm>
+          <a:prstGeom prst="rect">
+            <a:avLst/>
+          </a:prstGeom>
+          <a:noFill/>
+        </p:spPr>
+        <p:txBody>
+          <a:bodyPr wrap="square">
+            <a:spAutoFit/>
+          </a:bodyPr>
+          <a:lstStyle/>
+          <a:p>
+            <a:pPr algn="ctr"/>
+            <a:r>
+              <a:rPr sz="800" b="0">
+                <a:solidFill>
+                  <a:srgbClr val="1E2761"/>
+                </a:solidFill>
+                <a:latin typeface="Calibri"/>
+              </a:rPr>
+              <a:t>© 2026 Proxiant Academy | info@proxiant.com | proxiant.ai/training</a:t>
+            </a:r>
+          </a:p>
+        </p:txBody>
+      </p:sp>
     </p:spTree>
   </p:cSld>
   <p:clrMapOvr>
@@ -6580,6 +7105,41 @@
           </a:p>
         </p:txBody>
       </p:sp>
+      <p:sp>
+        <p:nvSpPr>
+          <p:cNvPr id="7" name="TextBox 6"/>
+          <p:cNvSpPr txBox="1"/>
+          <p:nvPr/>
+        </p:nvSpPr>
+        <p:spPr>
+          <a:xfrm>
+            <a:off x="457200" y="6620256"/>
+            <a:ext cx="11247120" cy="201168"/>
+          </a:xfrm>
+          <a:prstGeom prst="rect">
+            <a:avLst/>
+          </a:prstGeom>
+          <a:noFill/>
+        </p:spPr>
+        <p:txBody>
+          <a:bodyPr wrap="square">
+            <a:spAutoFit/>
+          </a:bodyPr>
+          <a:lstStyle/>
+          <a:p>
+            <a:pPr algn="ctr"/>
+            <a:r>
+              <a:rPr sz="800" b="0">
+                <a:solidFill>
+                  <a:srgbClr val="FFFFFF"/>
+                </a:solidFill>
+                <a:latin typeface="Calibri"/>
+              </a:rPr>
+              <a:t>© 2026 Proxiant Academy | info@proxiant.com | proxiant.ai/training</a:t>
+            </a:r>
+          </a:p>
+        </p:txBody>
+      </p:sp>
     </p:spTree>
   </p:cSld>
   <p:clrMapOvr>
@@ -6824,7 +7384,7 @@
         </p:nvSpPr>
         <p:spPr>
           <a:xfrm>
-            <a:off x="640080" y="6400800"/>
+            <a:off x="640080" y="6217920"/>
             <a:ext cx="10972800" cy="365760"/>
           </a:xfrm>
           <a:prstGeom prst="rect">
@@ -6847,6 +7407,41 @@
                 <a:latin typeface="Calibri"/>
               </a:rPr>
               <a:t>Quiz Tuesday | Project due next Saturday | Instructor: Pavan R</a:t>
+            </a:r>
+          </a:p>
+        </p:txBody>
+      </p:sp>
+      <p:sp>
+        <p:nvSpPr>
+          <p:cNvPr id="9" name="TextBox 8"/>
+          <p:cNvSpPr txBox="1"/>
+          <p:nvPr/>
+        </p:nvSpPr>
+        <p:spPr>
+          <a:xfrm>
+            <a:off x="457200" y="6620256"/>
+            <a:ext cx="11247120" cy="201168"/>
+          </a:xfrm>
+          <a:prstGeom prst="rect">
+            <a:avLst/>
+          </a:prstGeom>
+          <a:noFill/>
+        </p:spPr>
+        <p:txBody>
+          <a:bodyPr wrap="square">
+            <a:spAutoFit/>
+          </a:bodyPr>
+          <a:lstStyle/>
+          <a:p>
+            <a:pPr algn="ctr"/>
+            <a:r>
+              <a:rPr sz="800" b="0">
+                <a:solidFill>
+                  <a:srgbClr val="FFFFFF"/>
+                </a:solidFill>
+                <a:latin typeface="Calibri"/>
+              </a:rPr>
+              <a:t>© 2026 Proxiant Academy | info@proxiant.com | proxiant.ai/training</a:t>
             </a:r>
           </a:p>
         </p:txBody>
@@ -7064,6 +7659,41 @@
           </a:p>
         </p:txBody>
       </p:sp>
+      <p:sp>
+        <p:nvSpPr>
+          <p:cNvPr id="7" name="TextBox 6"/>
+          <p:cNvSpPr txBox="1"/>
+          <p:nvPr/>
+        </p:nvSpPr>
+        <p:spPr>
+          <a:xfrm>
+            <a:off x="457200" y="6620256"/>
+            <a:ext cx="11247120" cy="201168"/>
+          </a:xfrm>
+          <a:prstGeom prst="rect">
+            <a:avLst/>
+          </a:prstGeom>
+          <a:noFill/>
+        </p:spPr>
+        <p:txBody>
+          <a:bodyPr wrap="square">
+            <a:spAutoFit/>
+          </a:bodyPr>
+          <a:lstStyle/>
+          <a:p>
+            <a:pPr algn="ctr"/>
+            <a:r>
+              <a:rPr sz="800" b="0">
+                <a:solidFill>
+                  <a:srgbClr val="FFFFFF"/>
+                </a:solidFill>
+                <a:latin typeface="Calibri"/>
+              </a:rPr>
+              <a:t>© 2026 Proxiant Academy | info@proxiant.com | proxiant.ai/training</a:t>
+            </a:r>
+          </a:p>
+        </p:txBody>
+      </p:sp>
     </p:spTree>
   </p:cSld>
   <p:clrMapOvr>
@@ -7341,6 +7971,41 @@
           </a:p>
         </p:txBody>
       </p:sp>
+      <p:sp>
+        <p:nvSpPr>
+          <p:cNvPr id="7" name="TextBox 6"/>
+          <p:cNvSpPr txBox="1"/>
+          <p:nvPr/>
+        </p:nvSpPr>
+        <p:spPr>
+          <a:xfrm>
+            <a:off x="457200" y="6620256"/>
+            <a:ext cx="11247120" cy="201168"/>
+          </a:xfrm>
+          <a:prstGeom prst="rect">
+            <a:avLst/>
+          </a:prstGeom>
+          <a:noFill/>
+        </p:spPr>
+        <p:txBody>
+          <a:bodyPr wrap="square">
+            <a:spAutoFit/>
+          </a:bodyPr>
+          <a:lstStyle/>
+          <a:p>
+            <a:pPr algn="ctr"/>
+            <a:r>
+              <a:rPr sz="800" b="0">
+                <a:solidFill>
+                  <a:srgbClr val="FFFFFF"/>
+                </a:solidFill>
+                <a:latin typeface="Calibri"/>
+              </a:rPr>
+              <a:t>© 2026 Proxiant Academy | info@proxiant.com | proxiant.ai/training</a:t>
+            </a:r>
+          </a:p>
+        </p:txBody>
+      </p:sp>
     </p:spTree>
   </p:cSld>
   <p:clrMapOvr>
@@ -7515,6 +8180,41 @@
           </a:p>
         </p:txBody>
       </p:sp>
+      <p:sp>
+        <p:nvSpPr>
+          <p:cNvPr id="6" name="TextBox 5"/>
+          <p:cNvSpPr txBox="1"/>
+          <p:nvPr/>
+        </p:nvSpPr>
+        <p:spPr>
+          <a:xfrm>
+            <a:off x="457200" y="6620256"/>
+            <a:ext cx="11247120" cy="201168"/>
+          </a:xfrm>
+          <a:prstGeom prst="rect">
+            <a:avLst/>
+          </a:prstGeom>
+          <a:noFill/>
+        </p:spPr>
+        <p:txBody>
+          <a:bodyPr wrap="square">
+            <a:spAutoFit/>
+          </a:bodyPr>
+          <a:lstStyle/>
+          <a:p>
+            <a:pPr algn="ctr"/>
+            <a:r>
+              <a:rPr sz="800" b="0">
+                <a:solidFill>
+                  <a:srgbClr val="1E2761"/>
+                </a:solidFill>
+                <a:latin typeface="Calibri"/>
+              </a:rPr>
+              <a:t>© 2026 Proxiant Academy | info@proxiant.com | proxiant.ai/training</a:t>
+            </a:r>
+          </a:p>
+        </p:txBody>
+      </p:sp>
     </p:spTree>
   </p:cSld>
   <p:clrMapOvr>
@@ -7728,6 +8428,41 @@
           </a:p>
         </p:txBody>
       </p:sp>
+      <p:sp>
+        <p:nvSpPr>
+          <p:cNvPr id="7" name="TextBox 6"/>
+          <p:cNvSpPr txBox="1"/>
+          <p:nvPr/>
+        </p:nvSpPr>
+        <p:spPr>
+          <a:xfrm>
+            <a:off x="457200" y="6620256"/>
+            <a:ext cx="11247120" cy="201168"/>
+          </a:xfrm>
+          <a:prstGeom prst="rect">
+            <a:avLst/>
+          </a:prstGeom>
+          <a:noFill/>
+        </p:spPr>
+        <p:txBody>
+          <a:bodyPr wrap="square">
+            <a:spAutoFit/>
+          </a:bodyPr>
+          <a:lstStyle/>
+          <a:p>
+            <a:pPr algn="ctr"/>
+            <a:r>
+              <a:rPr sz="800" b="0">
+                <a:solidFill>
+                  <a:srgbClr val="FFFFFF"/>
+                </a:solidFill>
+                <a:latin typeface="Calibri"/>
+              </a:rPr>
+              <a:t>© 2026 Proxiant Academy | info@proxiant.com | proxiant.ai/training</a:t>
+            </a:r>
+          </a:p>
+        </p:txBody>
+      </p:sp>
     </p:spTree>
   </p:cSld>
   <p:clrMapOvr>
@@ -7941,6 +8676,41 @@
           </a:p>
         </p:txBody>
       </p:sp>
+      <p:sp>
+        <p:nvSpPr>
+          <p:cNvPr id="7" name="TextBox 6"/>
+          <p:cNvSpPr txBox="1"/>
+          <p:nvPr/>
+        </p:nvSpPr>
+        <p:spPr>
+          <a:xfrm>
+            <a:off x="457200" y="6620256"/>
+            <a:ext cx="11247120" cy="201168"/>
+          </a:xfrm>
+          <a:prstGeom prst="rect">
+            <a:avLst/>
+          </a:prstGeom>
+          <a:noFill/>
+        </p:spPr>
+        <p:txBody>
+          <a:bodyPr wrap="square">
+            <a:spAutoFit/>
+          </a:bodyPr>
+          <a:lstStyle/>
+          <a:p>
+            <a:pPr algn="ctr"/>
+            <a:r>
+              <a:rPr sz="800" b="0">
+                <a:solidFill>
+                  <a:srgbClr val="FFFFFF"/>
+                </a:solidFill>
+                <a:latin typeface="Calibri"/>
+              </a:rPr>
+              <a:t>© 2026 Proxiant Academy | info@proxiant.com | proxiant.ai/training</a:t>
+            </a:r>
+          </a:p>
+        </p:txBody>
+      </p:sp>
     </p:spTree>
   </p:cSld>
   <p:clrMapOvr>
@@ -8154,6 +8924,41 @@
           </a:p>
         </p:txBody>
       </p:sp>
+      <p:sp>
+        <p:nvSpPr>
+          <p:cNvPr id="7" name="TextBox 6"/>
+          <p:cNvSpPr txBox="1"/>
+          <p:nvPr/>
+        </p:nvSpPr>
+        <p:spPr>
+          <a:xfrm>
+            <a:off x="457200" y="6620256"/>
+            <a:ext cx="11247120" cy="201168"/>
+          </a:xfrm>
+          <a:prstGeom prst="rect">
+            <a:avLst/>
+          </a:prstGeom>
+          <a:noFill/>
+        </p:spPr>
+        <p:txBody>
+          <a:bodyPr wrap="square">
+            <a:spAutoFit/>
+          </a:bodyPr>
+          <a:lstStyle/>
+          <a:p>
+            <a:pPr algn="ctr"/>
+            <a:r>
+              <a:rPr sz="800" b="0">
+                <a:solidFill>
+                  <a:srgbClr val="FFFFFF"/>
+                </a:solidFill>
+                <a:latin typeface="Calibri"/>
+              </a:rPr>
+              <a:t>© 2026 Proxiant Academy | info@proxiant.com | proxiant.ai/training</a:t>
+            </a:r>
+          </a:p>
+        </p:txBody>
+      </p:sp>
     </p:spTree>
   </p:cSld>
   <p:clrMapOvr>
@@ -8364,6 +9169,41 @@
           <a:lstStyle/>
           <a:p>
             <a:pPr algn="ctr"/>
+          </a:p>
+        </p:txBody>
+      </p:sp>
+      <p:sp>
+        <p:nvSpPr>
+          <p:cNvPr id="7" name="TextBox 6"/>
+          <p:cNvSpPr txBox="1"/>
+          <p:nvPr/>
+        </p:nvSpPr>
+        <p:spPr>
+          <a:xfrm>
+            <a:off x="457200" y="6620256"/>
+            <a:ext cx="11247120" cy="201168"/>
+          </a:xfrm>
+          <a:prstGeom prst="rect">
+            <a:avLst/>
+          </a:prstGeom>
+          <a:noFill/>
+        </p:spPr>
+        <p:txBody>
+          <a:bodyPr wrap="square">
+            <a:spAutoFit/>
+          </a:bodyPr>
+          <a:lstStyle/>
+          <a:p>
+            <a:pPr algn="ctr"/>
+            <a:r>
+              <a:rPr sz="800" b="0">
+                <a:solidFill>
+                  <a:srgbClr val="FFFFFF"/>
+                </a:solidFill>
+                <a:latin typeface="Calibri"/>
+              </a:rPr>
+              <a:t>© 2026 Proxiant Academy | info@proxiant.com | proxiant.ai/training</a:t>
+            </a:r>
           </a:p>
         </p:txBody>
       </p:sp>
